--- a/PPTX/Parts/Part-IntroductionShannon.pptx
+++ b/PPTX/Parts/Part-IntroductionShannon.pptx
@@ -14,7 +14,8 @@
     <p:sldId id="262" r:id="rId8"/>
     <p:sldId id="264" r:id="rId9"/>
     <p:sldId id="265" r:id="rId10"/>
-    <p:sldId id="263" r:id="rId11"/>
+    <p:sldId id="266" r:id="rId11"/>
+    <p:sldId id="263" r:id="rId12"/>
   </p:sldIdLst>
   <p:sldSz cx="12192000" cy="6858000"/>
   <p:notesSz cx="6858000" cy="9144000"/>
@@ -113,6 +114,11 @@
       </a:defRPr>
     </a:lvl9pPr>
   </p:defaultTextStyle>
+  <p:extLst>
+    <p:ext uri="{EFAFB233-063F-42B5-8137-9DF3F51BA10A}">
+      <p15:sldGuideLst xmlns:p15="http://schemas.microsoft.com/office/powerpoint/2012/main"/>
+    </p:ext>
+  </p:extLst>
 </p:presentation>
 </file>
 
@@ -265,7 +271,7 @@
           <a:p>
             <a:fld id="{9D4F9581-0546-4CC7-AFB9-3FA36B64B94A}" type="datetimeFigureOut">
               <a:rPr kumimoji="1" lang="ja-JP" altLang="en-US" smtClean="0"/>
-              <a:t>2026/6/18</a:t>
+              <a:t>2026/6/24</a:t>
             </a:fld>
             <a:endParaRPr kumimoji="1" lang="ja-JP" altLang="en-US"/>
           </a:p>
@@ -465,7 +471,7 @@
           <a:p>
             <a:fld id="{9D4F9581-0546-4CC7-AFB9-3FA36B64B94A}" type="datetimeFigureOut">
               <a:rPr kumimoji="1" lang="ja-JP" altLang="en-US" smtClean="0"/>
-              <a:t>2026/6/18</a:t>
+              <a:t>2026/6/24</a:t>
             </a:fld>
             <a:endParaRPr kumimoji="1" lang="ja-JP" altLang="en-US"/>
           </a:p>
@@ -675,7 +681,7 @@
           <a:p>
             <a:fld id="{9D4F9581-0546-4CC7-AFB9-3FA36B64B94A}" type="datetimeFigureOut">
               <a:rPr kumimoji="1" lang="ja-JP" altLang="en-US" smtClean="0"/>
-              <a:t>2026/6/18</a:t>
+              <a:t>2026/6/24</a:t>
             </a:fld>
             <a:endParaRPr kumimoji="1" lang="ja-JP" altLang="en-US"/>
           </a:p>
@@ -875,7 +881,7 @@
           <a:p>
             <a:fld id="{9D4F9581-0546-4CC7-AFB9-3FA36B64B94A}" type="datetimeFigureOut">
               <a:rPr kumimoji="1" lang="ja-JP" altLang="en-US" smtClean="0"/>
-              <a:t>2026/6/18</a:t>
+              <a:t>2026/6/24</a:t>
             </a:fld>
             <a:endParaRPr kumimoji="1" lang="ja-JP" altLang="en-US"/>
           </a:p>
@@ -1151,7 +1157,7 @@
           <a:p>
             <a:fld id="{9D4F9581-0546-4CC7-AFB9-3FA36B64B94A}" type="datetimeFigureOut">
               <a:rPr kumimoji="1" lang="ja-JP" altLang="en-US" smtClean="0"/>
-              <a:t>2026/6/18</a:t>
+              <a:t>2026/6/24</a:t>
             </a:fld>
             <a:endParaRPr kumimoji="1" lang="ja-JP" altLang="en-US"/>
           </a:p>
@@ -1419,7 +1425,7 @@
           <a:p>
             <a:fld id="{9D4F9581-0546-4CC7-AFB9-3FA36B64B94A}" type="datetimeFigureOut">
               <a:rPr kumimoji="1" lang="ja-JP" altLang="en-US" smtClean="0"/>
-              <a:t>2026/6/18</a:t>
+              <a:t>2026/6/24</a:t>
             </a:fld>
             <a:endParaRPr kumimoji="1" lang="ja-JP" altLang="en-US"/>
           </a:p>
@@ -1834,7 +1840,7 @@
           <a:p>
             <a:fld id="{9D4F9581-0546-4CC7-AFB9-3FA36B64B94A}" type="datetimeFigureOut">
               <a:rPr kumimoji="1" lang="ja-JP" altLang="en-US" smtClean="0"/>
-              <a:t>2026/6/18</a:t>
+              <a:t>2026/6/24</a:t>
             </a:fld>
             <a:endParaRPr kumimoji="1" lang="ja-JP" altLang="en-US"/>
           </a:p>
@@ -1976,7 +1982,7 @@
           <a:p>
             <a:fld id="{9D4F9581-0546-4CC7-AFB9-3FA36B64B94A}" type="datetimeFigureOut">
               <a:rPr kumimoji="1" lang="ja-JP" altLang="en-US" smtClean="0"/>
-              <a:t>2026/6/18</a:t>
+              <a:t>2026/6/24</a:t>
             </a:fld>
             <a:endParaRPr kumimoji="1" lang="ja-JP" altLang="en-US"/>
           </a:p>
@@ -2089,7 +2095,7 @@
           <a:p>
             <a:fld id="{9D4F9581-0546-4CC7-AFB9-3FA36B64B94A}" type="datetimeFigureOut">
               <a:rPr kumimoji="1" lang="ja-JP" altLang="en-US" smtClean="0"/>
-              <a:t>2026/6/18</a:t>
+              <a:t>2026/6/24</a:t>
             </a:fld>
             <a:endParaRPr kumimoji="1" lang="ja-JP" altLang="en-US"/>
           </a:p>
@@ -2402,7 +2408,7 @@
           <a:p>
             <a:fld id="{9D4F9581-0546-4CC7-AFB9-3FA36B64B94A}" type="datetimeFigureOut">
               <a:rPr kumimoji="1" lang="ja-JP" altLang="en-US" smtClean="0"/>
-              <a:t>2026/6/18</a:t>
+              <a:t>2026/6/24</a:t>
             </a:fld>
             <a:endParaRPr kumimoji="1" lang="ja-JP" altLang="en-US"/>
           </a:p>
@@ -2691,7 +2697,7 @@
           <a:p>
             <a:fld id="{9D4F9581-0546-4CC7-AFB9-3FA36B64B94A}" type="datetimeFigureOut">
               <a:rPr kumimoji="1" lang="ja-JP" altLang="en-US" smtClean="0"/>
-              <a:t>2026/6/18</a:t>
+              <a:t>2026/6/24</a:t>
             </a:fld>
             <a:endParaRPr kumimoji="1" lang="ja-JP" altLang="en-US"/>
           </a:p>
@@ -2934,7 +2940,7 @@
           <a:p>
             <a:fld id="{9D4F9581-0546-4CC7-AFB9-3FA36B64B94A}" type="datetimeFigureOut">
               <a:rPr kumimoji="1" lang="ja-JP" altLang="en-US" smtClean="0"/>
-              <a:t>2026/6/18</a:t>
+              <a:t>2026/6/24</a:t>
             </a:fld>
             <a:endParaRPr kumimoji="1" lang="ja-JP" altLang="en-US"/>
           </a:p>
@@ -3432,6 +3438,66 @@
 </file>
 
 <file path=ppt/slides/slide10.xml><?xml version="1.0" encoding="utf-8"?>
+<p:sld xmlns:a="http://schemas.openxmlformats.org/drawingml/2006/main" xmlns:r="http://schemas.openxmlformats.org/officeDocument/2006/relationships" xmlns:p="http://schemas.openxmlformats.org/presentationml/2006/main">
+  <p:cSld>
+    <p:spTree>
+      <p:nvGrpSpPr>
+        <p:cNvPr id="1" name=""/>
+        <p:cNvGrpSpPr/>
+        <p:nvPr/>
+      </p:nvGrpSpPr>
+      <p:grpSpPr>
+        <a:xfrm>
+          <a:off x="0" y="0"/>
+          <a:ext cx="0" cy="0"/>
+          <a:chOff x="0" y="0"/>
+          <a:chExt cx="0" cy="0"/>
+        </a:xfrm>
+      </p:grpSpPr>
+      <p:pic>
+        <p:nvPicPr>
+          <p:cNvPr id="5" name="Picture 4">
+            <a:extLst>
+              <a:ext uri="{FF2B5EF4-FFF2-40B4-BE49-F238E27FC236}">
+                <a16:creationId xmlns:a16="http://schemas.microsoft.com/office/drawing/2014/main" id="{2917F1F9-017E-3CA8-2424-7A13BB7CF3A2}"/>
+              </a:ext>
+            </a:extLst>
+          </p:cNvPr>
+          <p:cNvPicPr>
+            <a:picLocks noChangeAspect="1"/>
+          </p:cNvPicPr>
+          <p:nvPr/>
+        </p:nvPicPr>
+        <p:blipFill>
+          <a:blip r:embed="rId2"/>
+          <a:stretch>
+            <a:fillRect/>
+          </a:stretch>
+        </p:blipFill>
+        <p:spPr>
+          <a:xfrm>
+            <a:off x="396383" y="0"/>
+            <a:ext cx="11399233" cy="6858000"/>
+          </a:xfrm>
+          <a:prstGeom prst="rect">
+            <a:avLst/>
+          </a:prstGeom>
+        </p:spPr>
+      </p:pic>
+    </p:spTree>
+    <p:extLst>
+      <p:ext uri="{BB962C8B-B14F-4D97-AF65-F5344CB8AC3E}">
+        <p14:creationId xmlns:p14="http://schemas.microsoft.com/office/powerpoint/2010/main" val="194756342"/>
+      </p:ext>
+    </p:extLst>
+  </p:cSld>
+  <p:clrMapOvr>
+    <a:masterClrMapping/>
+  </p:clrMapOvr>
+</p:sld>
+</file>
+
+<file path=ppt/slides/slide11.xml><?xml version="1.0" encoding="utf-8"?>
 <p:sld xmlns:a="http://schemas.openxmlformats.org/drawingml/2006/main" xmlns:r="http://schemas.openxmlformats.org/officeDocument/2006/relationships" xmlns:p="http://schemas.openxmlformats.org/presentationml/2006/main">
   <p:cSld>
     <p:spTree>
